--- a/report/poster/poster_amd_zh.pptx
+++ b/report/poster/poster_amd_zh.pptx
@@ -1073,7 +1073,7 @@
                     <a:solidFill>
                       <a:srgbClr val="1F2933"/>
                     </a:solidFill>
-                    <a:ea typeface="Noto Sans SC"/>
+                    <a:ea typeface="Noto Sans SC Static"/>
                   </a:rPr>
                   <a:t>空口SNR (dB)</a:t>
                 </a:r>
@@ -1103,7 +1103,7 @@
                 <a:solidFill>
                   <a:srgbClr val="52606D"/>
                 </a:solidFill>
-                <a:ea typeface="Noto Sans SC"/>
+                <a:ea typeface="Noto Sans SC Static"/>
               </a:defRPr>
             </a:pPr>
           </a:p>
@@ -1142,7 +1142,7 @@
                     <a:solidFill>
                       <a:srgbClr val="1F2933"/>
                     </a:solidFill>
-                    <a:ea typeface="Noto Sans SC"/>
+                    <a:ea typeface="Noto Sans SC Static"/>
                   </a:rPr>
                   <a:t>PSNR (dB)</a:t>
                 </a:r>
@@ -1172,7 +1172,7 @@
                 <a:solidFill>
                   <a:srgbClr val="52606D"/>
                 </a:solidFill>
-                <a:ea typeface="Noto Sans SC"/>
+                <a:ea typeface="Noto Sans SC Static"/>
               </a:defRPr>
             </a:pPr>
           </a:p>
@@ -1199,11 +1199,11 @@
       <a:pPr>
         <a:defRPr sz="800">
           <a:latin typeface="Calibri"/>
-          <a:ea typeface="Noto Sans SC"/>
+          <a:ea typeface="Noto Sans SC Static"/>
         </a:defRPr>
       </a:pPr>
       <a:endParaRPr lang="en-US">
-        <a:ea typeface="Noto Sans SC"/>
+        <a:ea typeface="Noto Sans SC Static"/>
       </a:endParaRPr>
     </a:p>
   </c:txPr>
@@ -18513,7 +18513,7 @@
                   <a:schemeClr val="bg1"/>
                 </a:solidFill>
                 <a:latin typeface="Aharoni" panose="020F0502020204030204" pitchFamily="34" charset="0"/>
-                <a:ea typeface="Noto Sans SC Black"/>
+                <a:ea typeface="Noto Sans SC Static Black"/>
                 <a:cs typeface="Aharoni" panose="020F0502020204030204" pitchFamily="34" charset="0"/>
               </a:rPr>
               <a:t>作品简介</a:t>
@@ -18565,7 +18565,7 @@
               <a:buNone/>
               <a:tabLst/>
               <a:defRPr>
-                <a:ea typeface="Noto Sans SC"/>
+                <a:ea typeface="Noto Sans SC Static"/>
               </a:defRPr>
             </a:pPr>
             <a:r>
@@ -18604,7 +18604,7 @@
               <a:buNone/>
               <a:tabLst/>
               <a:defRPr>
-                <a:ea typeface="Noto Sans SC"/>
+                <a:ea typeface="Noto Sans SC Static"/>
               </a:defRPr>
             </a:pPr>
             <a:r>
@@ -18670,7 +18670,7 @@
                   <a:schemeClr val="tx1"/>
                 </a:solidFill>
                 <a:latin typeface="+mj-lt"/>
-                <a:ea typeface="Noto Sans SC"/>
+                <a:ea typeface="Noto Sans SC Static"/>
                 <a:cs typeface="+mj-cs"/>
               </a:defRPr>
             </a:lvl1pPr>
@@ -18692,7 +18692,7 @@
               <a:buNone/>
               <a:tabLst/>
               <a:defRPr>
-                <a:ea typeface="Noto Sans SC"/>
+                <a:ea typeface="Noto Sans SC Static"/>
               </a:defRPr>
             </a:pPr>
             <a:endParaRPr kumimoji="0" lang="en-US" sz="700" b="1" i="0" u="none" strike="noStrike" kern="1200" cap="none" spc="0" normalizeH="0" baseline="0" noProof="0" dirty="0">
@@ -18706,7 +18706,7 @@
               <a:uLnTx/>
               <a:uFillTx/>
               <a:latin typeface="Calibri" panose="020F0502020204030204"/>
-              <a:ea typeface="Noto Sans SC"/>
+              <a:ea typeface="Noto Sans SC Static"/>
               <a:cs typeface="+mj-cs"/>
             </a:endParaRPr>
           </a:p>
@@ -18873,7 +18873,7 @@
               <a:buNone/>
               <a:tabLst/>
               <a:defRPr>
-                <a:ea typeface="Noto Sans SC"/>
+                <a:ea typeface="Noto Sans SC Static"/>
               </a:defRPr>
             </a:pPr>
             <a:r>
@@ -18925,7 +18925,7 @@
           <a:lstStyle>
             <a:defPPr>
               <a:defRPr lang="en-US">
-                <a:ea typeface="Noto Sans SC"/>
+                <a:ea typeface="Noto Sans SC Static"/>
               </a:defRPr>
             </a:defPPr>
             <a:lvl1pPr indent="0">
@@ -18953,7 +18953,7 @@
               <a:buFont typeface="Arial" panose="020B0604020202020204" pitchFamily="34" charset="0"/>
               <a:buChar char="•"/>
               <a:defRPr sz="2400">
-                <a:ea typeface="Noto Sans SC"/>
+                <a:ea typeface="Noto Sans SC Static"/>
               </a:defRPr>
             </a:lvl2pPr>
             <a:lvl3pPr marL="1143000" indent="-228600">
@@ -18966,7 +18966,7 @@
               <a:buFont typeface="Arial" panose="020B0604020202020204" pitchFamily="34" charset="0"/>
               <a:buChar char="•"/>
               <a:defRPr sz="2000">
-                <a:ea typeface="Noto Sans SC"/>
+                <a:ea typeface="Noto Sans SC Static"/>
               </a:defRPr>
             </a:lvl3pPr>
             <a:lvl4pPr marL="1600200" indent="-228600">
@@ -19047,7 +19047,7 @@
               <a:buNone/>
               <a:tabLst/>
               <a:defRPr>
-                <a:ea typeface="Noto Sans SC"/>
+                <a:ea typeface="Noto Sans SC Static"/>
               </a:defRPr>
             </a:pPr>
             <a:r>
@@ -19085,7 +19085,7 @@
               <a:buNone/>
               <a:tabLst/>
               <a:defRPr>
-                <a:ea typeface="Noto Sans SC"/>
+                <a:ea typeface="Noto Sans SC Static"/>
               </a:defRPr>
             </a:pPr>
             <a:r>
@@ -19152,7 +19152,7 @@
               <a:buNone/>
               <a:tabLst/>
               <a:defRPr>
-                <a:ea typeface="Noto Sans SC"/>
+                <a:ea typeface="Noto Sans SC Static"/>
               </a:defRPr>
             </a:pPr>
             <a:r>
@@ -19191,7 +19191,7 @@
               <a:buNone/>
               <a:tabLst/>
               <a:defRPr>
-                <a:ea typeface="Noto Sans SC"/>
+                <a:ea typeface="Noto Sans SC Static"/>
               </a:defRPr>
             </a:pPr>
             <a:r>
@@ -19257,7 +19257,7 @@
                   <a:schemeClr val="tx1"/>
                 </a:solidFill>
                 <a:latin typeface="+mj-lt"/>
-                <a:ea typeface="Noto Sans SC"/>
+                <a:ea typeface="Noto Sans SC Static"/>
                 <a:cs typeface="+mj-cs"/>
               </a:defRPr>
             </a:lvl1pPr>
@@ -19279,7 +19279,7 @@
               <a:buNone/>
               <a:tabLst/>
               <a:defRPr>
-                <a:ea typeface="Noto Sans SC"/>
+                <a:ea typeface="Noto Sans SC Static"/>
               </a:defRPr>
             </a:pPr>
             <a:endParaRPr kumimoji="0" lang="en-US" sz="700" b="1" i="0" u="none" strike="noStrike" kern="1200" cap="none" spc="0" normalizeH="0" baseline="0" noProof="0" dirty="0">
@@ -19293,7 +19293,7 @@
               <a:uLnTx/>
               <a:uFillTx/>
               <a:latin typeface="Calibri" panose="020F0502020204030204"/>
-              <a:ea typeface="Noto Sans SC"/>
+              <a:ea typeface="Noto Sans SC Static"/>
               <a:cs typeface="+mj-cs"/>
             </a:endParaRPr>
           </a:p>
@@ -19337,8 +19337,8 @@
         </p:nvSpPr>
         <p:spPr>
           <a:xfrm>
-            <a:off x="7733160" y="2310130"/>
-            <a:ext cx="411468" cy="1117600"/>
+            <a:off x="7733160" y="2090674"/>
+            <a:ext cx="411468" cy="1556512"/>
           </a:xfrm>
           <a:prstGeom prst="rect">
             <a:avLst/>
@@ -19346,20 +19346,84 @@
           <a:noFill/>
         </p:spPr>
         <p:txBody>
-          <a:bodyPr wrap="square" anchor="ctr" lIns="0" rIns="0" tIns="0" bIns="0" vert="eaVert">
+          <a:bodyPr wrap="square" anchor="ctr" lIns="0" rIns="0" tIns="0" bIns="0">
             <a:spAutoFit/>
           </a:bodyPr>
           <a:lstStyle/>
           <a:p>
-            <a:pPr algn="ctr"/>
+            <a:pPr algn="ctr">
+              <a:lnSpc>
+                <a:spcPts val="2200"/>
+              </a:lnSpc>
+              <a:spcBef>
+                <a:spcPts val="0"/>
+              </a:spcBef>
+            </a:pPr>
             <a:r>
               <a:rPr sz="2200" b="1" lang="zh-CN" altLang="en-US">
                 <a:solidFill>
                   <a:srgbClr val="FFFFFF"/>
                 </a:solidFill>
-                <a:ea typeface="Noto Sans SC Black"/>
+                <a:ea typeface="Noto Sans SC Static"/>
               </a:rPr>
-              <a:t>创新设计</a:t>
+              <a:t>创</a:t>
+            </a:r>
+          </a:p>
+          <a:p>
+            <a:pPr algn="ctr">
+              <a:lnSpc>
+                <a:spcPts val="2200"/>
+              </a:lnSpc>
+              <a:spcBef>
+                <a:spcPts val="0"/>
+              </a:spcBef>
+            </a:pPr>
+            <a:r>
+              <a:rPr sz="2200" b="1" lang="zh-CN" altLang="en-US">
+                <a:solidFill>
+                  <a:srgbClr val="FFFFFF"/>
+                </a:solidFill>
+                <a:ea typeface="Noto Sans SC Static"/>
+              </a:rPr>
+              <a:t>新</a:t>
+            </a:r>
+          </a:p>
+          <a:p>
+            <a:pPr algn="ctr">
+              <a:lnSpc>
+                <a:spcPts val="2200"/>
+              </a:lnSpc>
+              <a:spcBef>
+                <a:spcPts val="0"/>
+              </a:spcBef>
+            </a:pPr>
+            <a:r>
+              <a:rPr sz="2200" b="1" lang="zh-CN" altLang="en-US">
+                <a:solidFill>
+                  <a:srgbClr val="FFFFFF"/>
+                </a:solidFill>
+                <a:ea typeface="Noto Sans SC Static"/>
+              </a:rPr>
+              <a:t>设</a:t>
+            </a:r>
+          </a:p>
+          <a:p>
+            <a:pPr algn="ctr">
+              <a:lnSpc>
+                <a:spcPts val="2200"/>
+              </a:lnSpc>
+              <a:spcBef>
+                <a:spcPts val="0"/>
+              </a:spcBef>
+            </a:pPr>
+            <a:r>
+              <a:rPr sz="2200" b="1" lang="zh-CN" altLang="en-US">
+                <a:solidFill>
+                  <a:srgbClr val="FFFFFF"/>
+                </a:solidFill>
+                <a:ea typeface="Noto Sans SC Static"/>
+              </a:rPr>
+              <a:t>计</a:t>
             </a:r>
           </a:p>
         </p:txBody>
@@ -19372,8 +19436,8 @@
         </p:nvSpPr>
         <p:spPr>
           <a:xfrm>
-            <a:off x="8507018" y="2271592"/>
-            <a:ext cx="411468" cy="1117600"/>
+            <a:off x="8507018" y="2052136"/>
+            <a:ext cx="411468" cy="1556512"/>
           </a:xfrm>
           <a:prstGeom prst="rect">
             <a:avLst/>
@@ -19381,20 +19445,84 @@
           <a:noFill/>
         </p:spPr>
         <p:txBody>
-          <a:bodyPr wrap="square" anchor="ctr" lIns="0" rIns="0" tIns="0" bIns="0" vert="eaVert">
+          <a:bodyPr wrap="square" anchor="ctr" lIns="0" rIns="0" tIns="0" bIns="0">
             <a:spAutoFit/>
           </a:bodyPr>
           <a:lstStyle/>
           <a:p>
-            <a:pPr algn="ctr"/>
+            <a:pPr algn="ctr">
+              <a:lnSpc>
+                <a:spcPts val="2200"/>
+              </a:lnSpc>
+              <a:spcBef>
+                <a:spcPts val="0"/>
+              </a:spcBef>
+            </a:pPr>
             <a:r>
               <a:rPr sz="2200" b="1" lang="zh-CN" altLang="en-US">
                 <a:solidFill>
                   <a:srgbClr val="FFFFFF"/>
                 </a:solidFill>
-                <a:ea typeface="Noto Sans SC Black"/>
+                <a:ea typeface="Noto Sans SC Static"/>
               </a:rPr>
-              <a:t>测试结果</a:t>
+              <a:t>测</a:t>
+            </a:r>
+          </a:p>
+          <a:p>
+            <a:pPr algn="ctr">
+              <a:lnSpc>
+                <a:spcPts val="2200"/>
+              </a:lnSpc>
+              <a:spcBef>
+                <a:spcPts val="0"/>
+              </a:spcBef>
+            </a:pPr>
+            <a:r>
+              <a:rPr sz="2200" b="1" lang="zh-CN" altLang="en-US">
+                <a:solidFill>
+                  <a:srgbClr val="FFFFFF"/>
+                </a:solidFill>
+                <a:ea typeface="Noto Sans SC Static"/>
+              </a:rPr>
+              <a:t>试</a:t>
+            </a:r>
+          </a:p>
+          <a:p>
+            <a:pPr algn="ctr">
+              <a:lnSpc>
+                <a:spcPts val="2200"/>
+              </a:lnSpc>
+              <a:spcBef>
+                <a:spcPts val="0"/>
+              </a:spcBef>
+            </a:pPr>
+            <a:r>
+              <a:rPr sz="2200" b="1" lang="zh-CN" altLang="en-US">
+                <a:solidFill>
+                  <a:srgbClr val="FFFFFF"/>
+                </a:solidFill>
+                <a:ea typeface="Noto Sans SC Static"/>
+              </a:rPr>
+              <a:t>结</a:t>
+            </a:r>
+          </a:p>
+          <a:p>
+            <a:pPr algn="ctr">
+              <a:lnSpc>
+                <a:spcPts val="2200"/>
+              </a:lnSpc>
+              <a:spcBef>
+                <a:spcPts val="0"/>
+              </a:spcBef>
+            </a:pPr>
+            <a:r>
+              <a:rPr sz="2200" b="1" lang="zh-CN" altLang="en-US">
+                <a:solidFill>
+                  <a:srgbClr val="FFFFFF"/>
+                </a:solidFill>
+                <a:ea typeface="Noto Sans SC Static"/>
+              </a:rPr>
+              <a:t>果</a:t>
             </a:r>
           </a:p>
         </p:txBody>
@@ -19476,7 +19604,7 @@
                   <a:srgbClr val="000000"/>
                 </a:solidFill>
                 <a:latin typeface="Calibri"/>
-                <a:ea typeface="Noto Sans SC"/>
+                <a:ea typeface="Noto Sans SC Static"/>
               </a:rPr>
               <a:t>无人机、机器人和远程摄像头的实时视频要经过信噪比时刻变化的无线链路。</a:t>
             </a:r>
@@ -19486,7 +19614,7 @@
                   <a:srgbClr val="000000"/>
                 </a:solidFill>
                 <a:latin typeface="Calibri"/>
-                <a:ea typeface="Noto Sans SC"/>
+                <a:ea typeface="Noto Sans SC Static"/>
               </a:rPr>
               <a:t>分离信源信道编码（SSCC）</a:t>
             </a:r>
@@ -19496,7 +19624,7 @@
                   <a:srgbClr val="000000"/>
                 </a:solidFill>
                 <a:latin typeface="Calibri"/>
-                <a:ea typeface="Noto Sans SC"/>
+                <a:ea typeface="Noto Sans SC Static"/>
               </a:rPr>
               <a:t>先用JPEG压缩、再加信道编码：信噪比低于纠错门限时，比特错误沿变长码扩散，整幅图像无法解码（</a:t>
             </a:r>
@@ -19506,7 +19634,7 @@
                   <a:srgbClr val="000000"/>
                 </a:solidFill>
                 <a:latin typeface="Calibri"/>
-                <a:ea typeface="Noto Sans SC"/>
+                <a:ea typeface="Noto Sans SC Static"/>
               </a:rPr>
               <a:t>悬崖效应</a:t>
             </a:r>
@@ -19516,7 +19644,7 @@
                   <a:srgbClr val="000000"/>
                 </a:solidFill>
                 <a:latin typeface="Calibri"/>
-                <a:ea typeface="Noto Sans SC"/>
+                <a:ea typeface="Noto Sans SC Static"/>
               </a:rPr>
               <a:t>）；高于门限后画质也不再提升。</a:t>
             </a:r>
@@ -19552,7 +19680,7 @@
                   <a:srgbClr val="000000"/>
                 </a:solidFill>
                 <a:latin typeface="Calibri"/>
-                <a:ea typeface="Noto Sans SC"/>
+                <a:ea typeface="Noto Sans SC Static"/>
               </a:rPr>
               <a:t>典型应用场景</a:t>
             </a:r>
@@ -19610,7 +19738,7 @@
                   <a:srgbClr val="1F2933"/>
                 </a:solidFill>
                 <a:latin typeface="Calibri"/>
-                <a:ea typeface="Noto Sans SC"/>
+                <a:ea typeface="Noto Sans SC Static"/>
               </a:rPr>
               <a:t>摄像头</a:t>
             </a:r>
@@ -19623,7 +19751,7 @@
                   <a:srgbClr val="52606D"/>
                 </a:solidFill>
                 <a:latin typeface="Calibri"/>
-                <a:ea typeface="Noto Sans SC"/>
+                <a:ea typeface="Noto Sans SC Static"/>
               </a:rPr>
               <a:t>无人机等</a:t>
             </a:r>
@@ -19717,7 +19845,7 @@
                   <a:srgbClr val="1F2933"/>
                 </a:solidFill>
                 <a:latin typeface="Calibri"/>
-                <a:ea typeface="Noto Sans SC"/>
+                <a:ea typeface="Noto Sans SC Static"/>
               </a:rPr>
               <a:t>编码器</a:t>
             </a:r>
@@ -19730,7 +19858,7 @@
                   <a:srgbClr val="52606D"/>
                 </a:solidFill>
                 <a:latin typeface="Calibri"/>
-                <a:ea typeface="Noto Sans SC"/>
+                <a:ea typeface="Noto Sans SC Static"/>
               </a:rPr>
               <a:t>FPGA，发端</a:t>
             </a:r>
@@ -19824,7 +19952,7 @@
                   <a:srgbClr val="1F2933"/>
                 </a:solidFill>
                 <a:latin typeface="Calibri"/>
-                <a:ea typeface="Noto Sans SC"/>
+                <a:ea typeface="Noto Sans SC Static"/>
               </a:rPr>
               <a:t>无线信道</a:t>
             </a:r>
@@ -19837,7 +19965,7 @@
                   <a:srgbClr val="52606D"/>
                 </a:solidFill>
                 <a:latin typeface="Calibri"/>
-                <a:ea typeface="Noto Sans SC"/>
+                <a:ea typeface="Noto Sans SC Static"/>
               </a:rPr>
               <a:t>噪声、衰落</a:t>
             </a:r>
@@ -19931,7 +20059,7 @@
                   <a:srgbClr val="1F2933"/>
                 </a:solidFill>
                 <a:latin typeface="Calibri"/>
-                <a:ea typeface="Noto Sans SC"/>
+                <a:ea typeface="Noto Sans SC Static"/>
               </a:rPr>
               <a:t>解码器</a:t>
             </a:r>
@@ -19944,7 +20072,7 @@
                   <a:srgbClr val="52606D"/>
                 </a:solidFill>
                 <a:latin typeface="Calibri"/>
-                <a:ea typeface="Noto Sans SC"/>
+                <a:ea typeface="Noto Sans SC Static"/>
               </a:rPr>
               <a:t>FPGA，收端</a:t>
             </a:r>
@@ -20038,7 +20166,7 @@
                   <a:srgbClr val="1F2933"/>
                 </a:solidFill>
                 <a:latin typeface="Calibri"/>
-                <a:ea typeface="Noto Sans SC"/>
+                <a:ea typeface="Noto Sans SC Static"/>
               </a:rPr>
               <a:t>显示</a:t>
             </a:r>
@@ -20051,7 +20179,7 @@
                   <a:srgbClr val="52606D"/>
                 </a:solidFill>
                 <a:latin typeface="Calibri"/>
-                <a:ea typeface="Noto Sans SC"/>
+                <a:ea typeface="Noto Sans SC Static"/>
               </a:rPr>
               <a:t>实时画面</a:t>
             </a:r>
@@ -20087,7 +20215,7 @@
                   <a:srgbClr val="000000"/>
                 </a:solidFill>
                 <a:latin typeface="Calibri"/>
-                <a:ea typeface="Noto Sans SC"/>
+                <a:ea typeface="Noto Sans SC Static"/>
               </a:rPr>
               <a:t>深度联合信源信道编码（DeepJSCC）</a:t>
             </a:r>
@@ -20097,7 +20225,7 @@
                   <a:srgbClr val="000000"/>
                 </a:solidFill>
                 <a:latin typeface="Calibri"/>
-                <a:ea typeface="Noto Sans SC"/>
+                <a:ea typeface="Noto Sans SC Static"/>
               </a:rPr>
               <a:t>用一对卷积神经网络把像素直接映射为信道符号，画质随信噪比平缓变化。</a:t>
             </a:r>
@@ -20107,7 +20235,7 @@
                   <a:srgbClr val="000000"/>
                 </a:solidFill>
                 <a:latin typeface="Calibri"/>
-                <a:ea typeface="Noto Sans SC"/>
+                <a:ea typeface="Noto Sans SC Static"/>
               </a:rPr>
               <a:t>DeepJSCC-Q</a:t>
             </a:r>
@@ -20117,7 +20245,7 @@
                   <a:srgbClr val="000000"/>
                 </a:solidFill>
                 <a:latin typeface="Calibri"/>
-                <a:ea typeface="Noto Sans SC"/>
+                <a:ea typeface="Noto Sans SC Static"/>
               </a:rPr>
               <a:t>（Tung等，JSAIT 2022）进一步把符号约束到QAM星座上，可接入标准数字物理层；但它计算量大，接收端还必须把未经判决的软符号送入解码器。</a:t>
             </a:r>
@@ -20134,7 +20262,7 @@
                   <a:srgbClr val="000000"/>
                 </a:solidFill>
                 <a:latin typeface="Calibri"/>
-                <a:ea typeface="Noto Sans SC"/>
+                <a:ea typeface="Noto Sans SC Static"/>
               </a:rPr>
               <a:t>GlideLink</a:t>
             </a:r>
@@ -20144,7 +20272,7 @@
                   <a:srgbClr val="000000"/>
                 </a:solidFill>
                 <a:latin typeface="Calibri"/>
-                <a:ea typeface="Noto Sans SC"/>
+                <a:ea typeface="Noto Sans SC Static"/>
               </a:rPr>
               <a:t>用两块AMD Zynq UltraScale+ MPSoC开发板（PYNQ-ZU）和AD9361射频子卡搭建了完整的实时链路：DeepJSCC-Q编码器、解码器和类802.11a OFDM物理层全部在PL中实现，</a:t>
             </a:r>
@@ -20154,7 +20282,7 @@
                   <a:srgbClr val="000000"/>
                 </a:solidFill>
                 <a:latin typeface="Calibri"/>
-                <a:ea typeface="Noto Sans SC"/>
+                <a:ea typeface="Noto Sans SC Static"/>
               </a:rPr>
               <a:t>经空口以30 fps传输256×256彩色图像</a:t>
             </a:r>
@@ -20164,7 +20292,7 @@
                   <a:srgbClr val="000000"/>
                 </a:solidFill>
                 <a:latin typeface="Calibri"/>
-                <a:ea typeface="Noto Sans SC"/>
+                <a:ea typeface="Noto Sans SC Static"/>
               </a:rPr>
               <a:t>；PS负责取图和射频配置，并在触摸屏上实时显示链路状态。</a:t>
             </a:r>
@@ -20181,7 +20309,7 @@
                   <a:srgbClr val="000000"/>
                 </a:solidFill>
                 <a:latin typeface="Calibri"/>
-                <a:ea typeface="Noto Sans SC"/>
+                <a:ea typeface="Noto Sans SC Static"/>
               </a:rPr>
               <a:t>关键技术问题：</a:t>
             </a:r>
@@ -20191,7 +20319,7 @@
                   <a:srgbClr val="000000"/>
                 </a:solidFill>
                 <a:latin typeface="Calibri"/>
-                <a:ea typeface="Noto Sans SC"/>
+                <a:ea typeface="Noto Sans SC Static"/>
               </a:rPr>
               <a:t>每帧1.15 GMAC的神经网络编解码器要以30 fps放进一片FPGA，且权重全部片上；683个符号的长OFDM帧要同步、跟踪到足以直接解码软符号的精度；还要在同一物理层上与JPEG + LDPC做公平的空口对比。</a:t>
             </a:r>
@@ -20275,7 +20403,7 @@
                   <a:srgbClr val="000000"/>
                 </a:solidFill>
                 <a:latin typeface="Calibri"/>
-                <a:ea typeface="Noto Sans SC"/>
+                <a:ea typeface="Noto Sans SC Static"/>
               </a:rPr>
               <a:t>发端板</a:t>
             </a:r>
@@ -20285,7 +20413,7 @@
                   <a:srgbClr val="52606D"/>
                 </a:solidFill>
                 <a:latin typeface="Calibri"/>
-                <a:ea typeface="Noto Sans SC"/>
+                <a:ea typeface="Noto Sans SC Static"/>
               </a:rPr>
               <a:t>  PYNQ-ZU (xczu5eg)</a:t>
             </a:r>
@@ -20343,7 +20471,7 @@
                   <a:srgbClr val="1F2933"/>
                 </a:solidFill>
                 <a:latin typeface="Calibri"/>
-                <a:ea typeface="Noto Sans SC"/>
+                <a:ea typeface="Noto Sans SC Static"/>
               </a:rPr>
               <a:t>PS</a:t>
             </a:r>
@@ -20356,7 +20484,7 @@
                   <a:srgbClr val="52606D"/>
                 </a:solidFill>
                 <a:latin typeface="Calibri"/>
-                <a:ea typeface="Noto Sans SC"/>
+                <a:ea typeface="Noto Sans SC Static"/>
               </a:rPr>
               <a:t>4×A53，Linux：取图、射频配置</a:t>
             </a:r>
@@ -20414,7 +20542,7 @@
                   <a:srgbClr val="1F2933"/>
                 </a:solidFill>
                 <a:latin typeface="Calibri"/>
-                <a:ea typeface="Noto Sans SC"/>
+                <a:ea typeface="Noto Sans SC Static"/>
               </a:rPr>
               <a:t>PL</a:t>
             </a:r>
@@ -20427,7 +20555,7 @@
                   <a:srgbClr val="52606D"/>
                 </a:solidFill>
                 <a:latin typeface="Calibri"/>
-                <a:ea typeface="Noto Sans SC"/>
+                <a:ea typeface="Noto Sans SC Static"/>
               </a:rPr>
               <a:t>CNN编码、OFDM发射、LDPC编码</a:t>
             </a:r>
@@ -20485,7 +20613,7 @@
                   <a:srgbClr val="1F2933"/>
                 </a:solidFill>
                 <a:latin typeface="Calibri"/>
-                <a:ea typeface="Noto Sans SC"/>
+                <a:ea typeface="Noto Sans SC Static"/>
               </a:rPr>
               <a:t>摄像头</a:t>
             </a:r>
@@ -20557,7 +20685,7 @@
                   <a:srgbClr val="52606D"/>
                 </a:solidFill>
                 <a:latin typeface="Calibri"/>
-                <a:ea typeface="Noto Sans SC"/>
+                <a:ea typeface="Noto Sans SC Static"/>
               </a:rPr>
               <a:t>USB</a:t>
             </a:r>
@@ -20615,7 +20743,7 @@
                   <a:srgbClr val="1F2933"/>
                 </a:solidFill>
                 <a:latin typeface="Calibri"/>
-                <a:ea typeface="Noto Sans SC"/>
+                <a:ea typeface="Noto Sans SC Static"/>
               </a:rPr>
               <a:t>AD9361</a:t>
             </a:r>
@@ -20628,7 +20756,7 @@
                   <a:srgbClr val="52606D"/>
                 </a:solidFill>
                 <a:latin typeface="Calibri"/>
-                <a:ea typeface="Noto Sans SC"/>
+                <a:ea typeface="Noto Sans SC Static"/>
               </a:rPr>
               <a:t>射频子卡</a:t>
             </a:r>
@@ -20737,7 +20865,7 @@
                   <a:srgbClr val="52606D"/>
                 </a:solidFill>
                 <a:latin typeface="Calibri"/>
-                <a:ea typeface="Noto Sans SC"/>
+                <a:ea typeface="Noto Sans SC Static"/>
               </a:rPr>
               <a:t>AXI</a:t>
             </a:r>
@@ -20773,7 +20901,7 @@
                   <a:srgbClr val="52606D"/>
                 </a:solidFill>
                 <a:latin typeface="Calibri"/>
-                <a:ea typeface="Noto Sans SC"/>
+                <a:ea typeface="Noto Sans SC Static"/>
               </a:rPr>
               <a:t>FMC</a:t>
             </a:r>
@@ -20997,7 +21125,7 @@
                   <a:srgbClr val="000000"/>
                 </a:solidFill>
                 <a:latin typeface="Calibri"/>
-                <a:ea typeface="Noto Sans SC"/>
+                <a:ea typeface="Noto Sans SC Static"/>
               </a:rPr>
               <a:t>收端板</a:t>
             </a:r>
@@ -21007,7 +21135,7 @@
                   <a:srgbClr val="52606D"/>
                 </a:solidFill>
                 <a:latin typeface="Calibri"/>
-                <a:ea typeface="Noto Sans SC"/>
+                <a:ea typeface="Noto Sans SC Static"/>
               </a:rPr>
               <a:t>  PYNQ-ZU (xczu5eg)</a:t>
             </a:r>
@@ -21065,7 +21193,7 @@
                   <a:srgbClr val="1F2933"/>
                 </a:solidFill>
                 <a:latin typeface="Calibri"/>
-                <a:ea typeface="Noto Sans SC"/>
+                <a:ea typeface="Noto Sans SC Static"/>
               </a:rPr>
               <a:t>PS</a:t>
             </a:r>
@@ -21078,7 +21206,7 @@
                   <a:srgbClr val="52606D"/>
                 </a:solidFill>
                 <a:latin typeface="Calibri"/>
-                <a:ea typeface="Noto Sans SC"/>
+                <a:ea typeface="Noto Sans SC Static"/>
               </a:rPr>
               <a:t>A53 + Mali-400：界面、网页</a:t>
             </a:r>
@@ -21136,7 +21264,7 @@
                   <a:srgbClr val="1F2933"/>
                 </a:solidFill>
                 <a:latin typeface="Calibri"/>
-                <a:ea typeface="Noto Sans SC"/>
+                <a:ea typeface="Noto Sans SC Static"/>
               </a:rPr>
               <a:t>PL</a:t>
             </a:r>
@@ -21149,7 +21277,7 @@
                   <a:srgbClr val="52606D"/>
                 </a:solidFill>
                 <a:latin typeface="Calibri"/>
-                <a:ea typeface="Noto Sans SC"/>
+                <a:ea typeface="Noto Sans SC Static"/>
               </a:rPr>
               <a:t>OFDM接收、CNN解码、LDPC译码</a:t>
             </a:r>
@@ -21207,7 +21335,7 @@
                   <a:srgbClr val="1F2933"/>
                 </a:solidFill>
                 <a:latin typeface="Calibri"/>
-                <a:ea typeface="Noto Sans SC"/>
+                <a:ea typeface="Noto Sans SC Static"/>
               </a:rPr>
               <a:t>触摸屏</a:t>
             </a:r>
@@ -21265,7 +21393,7 @@
                   <a:srgbClr val="1F2933"/>
                 </a:solidFill>
                 <a:latin typeface="Calibri"/>
-                <a:ea typeface="Noto Sans SC"/>
+                <a:ea typeface="Noto Sans SC Static"/>
               </a:rPr>
               <a:t>手机</a:t>
             </a:r>
@@ -21337,7 +21465,7 @@
                   <a:srgbClr val="52606D"/>
                 </a:solidFill>
                 <a:latin typeface="Calibri"/>
-                <a:ea typeface="Noto Sans SC"/>
+                <a:ea typeface="Noto Sans SC Static"/>
               </a:rPr>
               <a:t>DP</a:t>
             </a:r>
@@ -21411,7 +21539,7 @@
                   <a:srgbClr val="52606D"/>
                 </a:solidFill>
                 <a:latin typeface="Calibri"/>
-                <a:ea typeface="Noto Sans SC"/>
+                <a:ea typeface="Noto Sans SC Static"/>
               </a:rPr>
               <a:t>Wi-Fi</a:t>
             </a:r>
@@ -21469,7 +21597,7 @@
                   <a:srgbClr val="1F2933"/>
                 </a:solidFill>
                 <a:latin typeface="Calibri"/>
-                <a:ea typeface="Noto Sans SC"/>
+                <a:ea typeface="Noto Sans SC Static"/>
               </a:rPr>
               <a:t>AD9361</a:t>
             </a:r>
@@ -21482,7 +21610,7 @@
                   <a:srgbClr val="52606D"/>
                 </a:solidFill>
                 <a:latin typeface="Calibri"/>
-                <a:ea typeface="Noto Sans SC"/>
+                <a:ea typeface="Noto Sans SC Static"/>
               </a:rPr>
               <a:t>射频子卡</a:t>
             </a:r>
@@ -21591,7 +21719,7 @@
                   <a:srgbClr val="52606D"/>
                 </a:solidFill>
                 <a:latin typeface="Calibri"/>
-                <a:ea typeface="Noto Sans SC"/>
+                <a:ea typeface="Noto Sans SC Static"/>
               </a:rPr>
               <a:t>AXI</a:t>
             </a:r>
@@ -21627,7 +21755,7 @@
                   <a:srgbClr val="52606D"/>
                 </a:solidFill>
                 <a:latin typeface="Calibri"/>
-                <a:ea typeface="Noto Sans SC"/>
+                <a:ea typeface="Noto Sans SC Static"/>
               </a:rPr>
               <a:t>FMC</a:t>
             </a:r>
@@ -21839,7 +21967,7 @@
                   <a:srgbClr val="C8602A"/>
                 </a:solidFill>
                 <a:latin typeface="Calibri"/>
-                <a:ea typeface="Noto Sans SC"/>
+                <a:ea typeface="Noto Sans SC Static"/>
               </a:rPr>
               <a:t>空口</a:t>
             </a:r>
@@ -21913,7 +22041,7 @@
                   <a:srgbClr val="52606D"/>
                 </a:solidFill>
                 <a:latin typeface="Calibri"/>
-                <a:ea typeface="Noto Sans SC"/>
+                <a:ea typeface="Noto Sans SC Static"/>
               </a:rPr>
               <a:t>以太网：TX预览图、控制</a:t>
             </a:r>
@@ -21949,7 +22077,7 @@
                   <a:srgbClr val="000000"/>
                 </a:solidFill>
                 <a:latin typeface="Calibri"/>
-                <a:ea typeface="Noto Sans SC"/>
+                <a:ea typeface="Noto Sans SC Static"/>
               </a:rPr>
               <a:t>系统组成</a:t>
             </a:r>
@@ -21985,7 +22113,7 @@
                   <a:srgbClr val="000000"/>
                 </a:solidFill>
                 <a:latin typeface="Calibri"/>
-                <a:ea typeface="Noto Sans SC"/>
+                <a:ea typeface="Noto Sans SC Static"/>
               </a:rPr>
               <a:t>关键创新点与解决的技术问题</a:t>
             </a:r>
@@ -22045,7 +22173,7 @@
                   <a:srgbClr val="000000"/>
                 </a:solidFill>
                 <a:latin typeface="Calibri"/>
-                <a:ea typeface="Noto Sans SC"/>
+                <a:ea typeface="Noto Sans SC Static"/>
               </a:rPr>
               <a:t>1. 流式CNN加速器：</a:t>
             </a:r>
@@ -22055,7 +22183,7 @@
                   <a:srgbClr val="000000"/>
                 </a:solidFill>
                 <a:latin typeface="Calibri"/>
-                <a:ea typeface="Noto Sans SC"/>
+                <a:ea typeface="Noto Sans SC Static"/>
               </a:rPr>
               <a:t>W8A12整数运算，64个卷积引擎组成层流水，运行于250 MHz；权重与激活全部片上存储，不访问DDR。</a:t>
             </a:r>
@@ -22072,7 +22200,7 @@
                   <a:srgbClr val="000000"/>
                 </a:solidFill>
                 <a:latin typeface="Calibri"/>
-                <a:ea typeface="Noto Sans SC"/>
+                <a:ea typeface="Noto Sans SC Static"/>
               </a:rPr>
               <a:t>2. 非对称浅层解码器：</a:t>
             </a:r>
@@ -22082,7 +22210,7 @@
                   <a:srgbClr val="000000"/>
                 </a:solidFill>
                 <a:latin typeface="Calibri"/>
-                <a:ea typeface="Noto Sans SC"/>
+                <a:ea typeface="Noto Sans SC Static"/>
               </a:rPr>
               <a:t>与编码器联合训练，乘加量降为原解码器的1/102；卷积工作量是已发表FPGA DeepJSCC实现（GLOBECOM 2025）的5.2倍，DSP和BRAM用量却更少。</a:t>
             </a:r>
@@ -22099,7 +22227,7 @@
                   <a:srgbClr val="000000"/>
                 </a:solidFill>
                 <a:latin typeface="Calibri"/>
-                <a:ea typeface="Noto Sans SC"/>
+                <a:ea typeface="Noto Sans SC Static"/>
               </a:rPr>
               <a:t>3. 软符号OFDM物理层：</a:t>
             </a:r>
@@ -22109,7 +22237,7 @@
                   <a:srgbClr val="000000"/>
                 </a:solidFill>
                 <a:latin typeface="Calibri"/>
-                <a:ea typeface="Noto Sans SC"/>
+                <a:ea typeface="Noto Sans SC Static"/>
               </a:rPr>
               <a:t>683个符号的长帧、PN扰码、二阶SFO/CPE跟踪；均衡后的I/Q不经判决直接送入解码器。</a:t>
             </a:r>
@@ -22145,7 +22273,7 @@
                   <a:srgbClr val="000000"/>
                 </a:solidFill>
                 <a:latin typeface="Calibri"/>
-                <a:ea typeface="Noto Sans SC"/>
+                <a:ea typeface="Noto Sans SC Static"/>
               </a:rPr>
               <a:t>4. 完整演示系统：</a:t>
             </a:r>
@@ -22155,7 +22283,7 @@
                   <a:srgbClr val="000000"/>
                 </a:solidFill>
                 <a:latin typeface="Calibri"/>
-                <a:ea typeface="Noto Sans SC"/>
+                <a:ea typeface="Noto Sans SC Static"/>
               </a:rPr>
               <a:t>从摄像头到触摸屏，实时显示PSNR和星座图，并用Mali-400 GPU绘制信道三维图。</a:t>
             </a:r>
@@ -22191,7 +22319,7 @@
                   <a:srgbClr val="000000"/>
                 </a:solidFill>
                 <a:latin typeface="Calibri"/>
-                <a:ea typeface="Noto Sans SC"/>
+                <a:ea typeface="Noto Sans SC Static"/>
               </a:rPr>
               <a:t>空口实测PSNR（DIV2K 0802，每幅图32,768个64QAM符号）</a:t>
             </a:r>
@@ -22245,7 +22373,7 @@
                   <a:srgbClr val="000000"/>
                 </a:solidFill>
                 <a:latin typeface="Calibri"/>
-                <a:ea typeface="Noto Sans SC"/>
+                <a:ea typeface="Noto Sans SC Static"/>
               </a:rPr>
               <a:t>DeepJSCC-Q在高SNR时比JPEG + LDPC高</a:t>
             </a:r>
@@ -22255,7 +22383,7 @@
                   <a:srgbClr val="000000"/>
                 </a:solidFill>
                 <a:latin typeface="Calibri"/>
-                <a:ea typeface="Noto Sans SC"/>
+                <a:ea typeface="Noto Sans SC Static"/>
               </a:rPr>
               <a:t>2.8 dB</a:t>
             </a:r>
@@ -22265,7 +22393,7 @@
                   <a:srgbClr val="000000"/>
                 </a:solidFill>
                 <a:latin typeface="Calibri"/>
-                <a:ea typeface="Noto Sans SC"/>
+                <a:ea typeface="Noto Sans SC Static"/>
               </a:rPr>
               <a:t>，SNR降到2.9 dB时仍有</a:t>
             </a:r>
@@ -22275,7 +22403,7 @@
                   <a:srgbClr val="000000"/>
                 </a:solidFill>
                 <a:latin typeface="Calibri"/>
-                <a:ea typeface="Noto Sans SC"/>
+                <a:ea typeface="Noto Sans SC Static"/>
               </a:rPr>
               <a:t>23.5 dB</a:t>
             </a:r>
@@ -22285,7 +22413,7 @@
                   <a:srgbClr val="000000"/>
                 </a:solidFill>
                 <a:latin typeface="Calibri"/>
-                <a:ea typeface="Noto Sans SC"/>
+                <a:ea typeface="Noto Sans SC Static"/>
               </a:rPr>
               <a:t>；基线在16～19.5 dB处断崖式失效。</a:t>
             </a:r>
@@ -22345,7 +22473,7 @@
                   <a:srgbClr val="000000"/>
                 </a:solidFill>
                 <a:latin typeface="Calibri"/>
-                <a:ea typeface="Noto Sans SC"/>
+                <a:ea typeface="Noto Sans SC Static"/>
               </a:rPr>
               <a:t>30 fps</a:t>
             </a:r>
@@ -22355,7 +22483,7 @@
                   <a:srgbClr val="000000"/>
                 </a:solidFill>
                 <a:latin typeface="Calibri"/>
-                <a:ea typeface="Noto Sans SC"/>
+                <a:ea typeface="Noto Sans SC Static"/>
               </a:rPr>
               <a:t>连续运行10分钟（18,020帧），PL内端到端时延</a:t>
             </a:r>
@@ -22365,7 +22493,7 @@
                   <a:srgbClr val="000000"/>
                 </a:solidFill>
                 <a:latin typeface="Calibri"/>
-                <a:ea typeface="Noto Sans SC"/>
+                <a:ea typeface="Noto Sans SC Static"/>
               </a:rPr>
               <a:t>67.5 ms</a:t>
             </a:r>
@@ -22411,7 +22539,7 @@
                             <a:srgbClr val="000000"/>
                           </a:solidFill>
                           <a:latin typeface="Calibri"/>
-                          <a:ea typeface="Noto Sans SC"/>
+                          <a:ea typeface="Noto Sans SC Static"/>
                         </a:rPr>
                         <a:t>工程</a:t>
                       </a:r>
@@ -22435,7 +22563,7 @@
                             <a:srgbClr val="000000"/>
                           </a:solidFill>
                           <a:latin typeface="Calibri"/>
-                          <a:ea typeface="Noto Sans SC"/>
+                          <a:ea typeface="Noto Sans SC Static"/>
                         </a:rPr>
                         <a:t>LUT</a:t>
                       </a:r>
@@ -22459,7 +22587,7 @@
                             <a:srgbClr val="000000"/>
                           </a:solidFill>
                           <a:latin typeface="Calibri"/>
-                          <a:ea typeface="Noto Sans SC"/>
+                          <a:ea typeface="Noto Sans SC Static"/>
                         </a:rPr>
                         <a:t>BRAM36</a:t>
                       </a:r>
@@ -22483,7 +22611,7 @@
                             <a:srgbClr val="000000"/>
                           </a:solidFill>
                           <a:latin typeface="Calibri"/>
-                          <a:ea typeface="Noto Sans SC"/>
+                          <a:ea typeface="Noto Sans SC Static"/>
                         </a:rPr>
                         <a:t>DSP</a:t>
                       </a:r>
@@ -22507,7 +22635,7 @@
                             <a:srgbClr val="000000"/>
                           </a:solidFill>
                           <a:latin typeface="Calibri"/>
-                          <a:ea typeface="Noto Sans SC"/>
+                          <a:ea typeface="Noto Sans SC Static"/>
                         </a:rPr>
                         <a:t>WNS (ns)</a:t>
                       </a:r>
@@ -22531,7 +22659,7 @@
                             <a:srgbClr val="000000"/>
                           </a:solidFill>
                           <a:latin typeface="Calibri"/>
-                          <a:ea typeface="Noto Sans SC"/>
+                          <a:ea typeface="Noto Sans SC Static"/>
                         </a:rPr>
                         <a:t>功耗*</a:t>
                       </a:r>
@@ -22557,7 +22685,7 @@
                             <a:srgbClr val="000000"/>
                           </a:solidFill>
                           <a:latin typeface="Calibri"/>
-                          <a:ea typeface="Noto Sans SC"/>
+                          <a:ea typeface="Noto Sans SC Static"/>
                         </a:rPr>
                         <a:t>TX</a:t>
                       </a:r>
@@ -22581,7 +22709,7 @@
                             <a:srgbClr val="000000"/>
                           </a:solidFill>
                           <a:latin typeface="Calibri"/>
-                          <a:ea typeface="Noto Sans SC"/>
+                          <a:ea typeface="Noto Sans SC Static"/>
                         </a:rPr>
                         <a:t>54,241</a:t>
                       </a:r>
@@ -22605,7 +22733,7 @@
                             <a:srgbClr val="000000"/>
                           </a:solidFill>
                           <a:latin typeface="Calibri"/>
-                          <a:ea typeface="Noto Sans SC"/>
+                          <a:ea typeface="Noto Sans SC Static"/>
                         </a:rPr>
                         <a:t>104.5</a:t>
                       </a:r>
@@ -22629,7 +22757,7 @@
                             <a:srgbClr val="000000"/>
                           </a:solidFill>
                           <a:latin typeface="Calibri"/>
-                          <a:ea typeface="Noto Sans SC"/>
+                          <a:ea typeface="Noto Sans SC Static"/>
                         </a:rPr>
                         <a:t>243</a:t>
                       </a:r>
@@ -22653,7 +22781,7 @@
                             <a:srgbClr val="000000"/>
                           </a:solidFill>
                           <a:latin typeface="Calibri"/>
-                          <a:ea typeface="Noto Sans SC"/>
+                          <a:ea typeface="Noto Sans SC Static"/>
                         </a:rPr>
                         <a:t>+0.082</a:t>
                       </a:r>
@@ -22677,7 +22805,7 @@
                             <a:srgbClr val="000000"/>
                           </a:solidFill>
                           <a:latin typeface="Calibri"/>
-                          <a:ea typeface="Noto Sans SC"/>
+                          <a:ea typeface="Noto Sans SC Static"/>
                         </a:rPr>
                         <a:t>3.07 W</a:t>
                       </a:r>
@@ -22703,7 +22831,7 @@
                             <a:srgbClr val="000000"/>
                           </a:solidFill>
                           <a:latin typeface="Calibri"/>
-                          <a:ea typeface="Noto Sans SC"/>
+                          <a:ea typeface="Noto Sans SC Static"/>
                         </a:rPr>
                         <a:t>RX</a:t>
                       </a:r>
@@ -22727,7 +22855,7 @@
                             <a:srgbClr val="000000"/>
                           </a:solidFill>
                           <a:latin typeface="Calibri"/>
-                          <a:ea typeface="Noto Sans SC"/>
+                          <a:ea typeface="Noto Sans SC Static"/>
                         </a:rPr>
                         <a:t>63,699</a:t>
                       </a:r>
@@ -22751,7 +22879,7 @@
                             <a:srgbClr val="000000"/>
                           </a:solidFill>
                           <a:latin typeface="Calibri"/>
-                          <a:ea typeface="Noto Sans SC"/>
+                          <a:ea typeface="Noto Sans SC Static"/>
                         </a:rPr>
                         <a:t>65.5</a:t>
                       </a:r>
@@ -22775,7 +22903,7 @@
                             <a:srgbClr val="000000"/>
                           </a:solidFill>
                           <a:latin typeface="Calibri"/>
-                          <a:ea typeface="Noto Sans SC"/>
+                          <a:ea typeface="Noto Sans SC Static"/>
                         </a:rPr>
                         <a:t>133</a:t>
                       </a:r>
@@ -22799,7 +22927,7 @@
                             <a:srgbClr val="000000"/>
                           </a:solidFill>
                           <a:latin typeface="Calibri"/>
-                          <a:ea typeface="Noto Sans SC"/>
+                          <a:ea typeface="Noto Sans SC Static"/>
                         </a:rPr>
                         <a:t>+0.307</a:t>
                       </a:r>
@@ -22823,7 +22951,7 @@
                             <a:srgbClr val="000000"/>
                           </a:solidFill>
                           <a:latin typeface="Calibri"/>
-                          <a:ea typeface="Noto Sans SC"/>
+                          <a:ea typeface="Noto Sans SC Static"/>
                         </a:rPr>
                         <a:t>3.44 W</a:t>
                       </a:r>
@@ -22869,7 +22997,7 @@
                   <a:srgbClr val="52606D"/>
                 </a:solidFill>
                 <a:latin typeface="Calibri"/>
-                <a:ea typeface="Noto Sans SC"/>
+                <a:ea typeface="Noto Sans SC Static"/>
               </a:rPr>
               <a:t>* 功耗为实测值，含PS、PL与DDR；资源为xczu5eg布局布线后结果</a:t>
             </a:r>

--- a/report/poster/poster_amd_zh.pptx
+++ b/report/poster/poster_amd_zh.pptx
@@ -18508,7 +18508,7 @@
               </a:spcBef>
             </a:pPr>
             <a:r>
-              <a:rPr lang="zh-CN" sz="2200" b="1" dirty="0" altLang="en-US">
+              <a:rPr lang="zh-CN" sz="2200" b="0" dirty="0" altLang="en-US">
                 <a:solidFill>
                   <a:schemeClr val="bg1"/>
                 </a:solidFill>
@@ -19360,11 +19360,11 @@
               </a:spcBef>
             </a:pPr>
             <a:r>
-              <a:rPr sz="2200" b="1" lang="zh-CN" altLang="en-US">
+              <a:rPr sz="2200" b="0" lang="zh-CN" altLang="en-US">
                 <a:solidFill>
                   <a:srgbClr val="FFFFFF"/>
                 </a:solidFill>
-                <a:ea typeface="Noto Sans SC Static"/>
+                <a:ea typeface="Noto Sans SC Static Black"/>
               </a:rPr>
               <a:t>创</a:t>
             </a:r>
@@ -19379,11 +19379,11 @@
               </a:spcBef>
             </a:pPr>
             <a:r>
-              <a:rPr sz="2200" b="1" lang="zh-CN" altLang="en-US">
+              <a:rPr sz="2200" b="0" lang="zh-CN" altLang="en-US">
                 <a:solidFill>
                   <a:srgbClr val="FFFFFF"/>
                 </a:solidFill>
-                <a:ea typeface="Noto Sans SC Static"/>
+                <a:ea typeface="Noto Sans SC Static Black"/>
               </a:rPr>
               <a:t>新</a:t>
             </a:r>
@@ -19398,11 +19398,11 @@
               </a:spcBef>
             </a:pPr>
             <a:r>
-              <a:rPr sz="2200" b="1" lang="zh-CN" altLang="en-US">
+              <a:rPr sz="2200" b="0" lang="zh-CN" altLang="en-US">
                 <a:solidFill>
                   <a:srgbClr val="FFFFFF"/>
                 </a:solidFill>
-                <a:ea typeface="Noto Sans SC Static"/>
+                <a:ea typeface="Noto Sans SC Static Black"/>
               </a:rPr>
               <a:t>设</a:t>
             </a:r>
@@ -19417,11 +19417,11 @@
               </a:spcBef>
             </a:pPr>
             <a:r>
-              <a:rPr sz="2200" b="1" lang="zh-CN" altLang="en-US">
+              <a:rPr sz="2200" b="0" lang="zh-CN" altLang="en-US">
                 <a:solidFill>
                   <a:srgbClr val="FFFFFF"/>
                 </a:solidFill>
-                <a:ea typeface="Noto Sans SC Static"/>
+                <a:ea typeface="Noto Sans SC Static Black"/>
               </a:rPr>
               <a:t>计</a:t>
             </a:r>
@@ -19459,11 +19459,11 @@
               </a:spcBef>
             </a:pPr>
             <a:r>
-              <a:rPr sz="2200" b="1" lang="zh-CN" altLang="en-US">
+              <a:rPr sz="2200" b="0" lang="zh-CN" altLang="en-US">
                 <a:solidFill>
                   <a:srgbClr val="FFFFFF"/>
                 </a:solidFill>
-                <a:ea typeface="Noto Sans SC Static"/>
+                <a:ea typeface="Noto Sans SC Static Black"/>
               </a:rPr>
               <a:t>测</a:t>
             </a:r>
@@ -19478,11 +19478,11 @@
               </a:spcBef>
             </a:pPr>
             <a:r>
-              <a:rPr sz="2200" b="1" lang="zh-CN" altLang="en-US">
+              <a:rPr sz="2200" b="0" lang="zh-CN" altLang="en-US">
                 <a:solidFill>
                   <a:srgbClr val="FFFFFF"/>
                 </a:solidFill>
-                <a:ea typeface="Noto Sans SC Static"/>
+                <a:ea typeface="Noto Sans SC Static Black"/>
               </a:rPr>
               <a:t>试</a:t>
             </a:r>
@@ -19497,11 +19497,11 @@
               </a:spcBef>
             </a:pPr>
             <a:r>
-              <a:rPr sz="2200" b="1" lang="zh-CN" altLang="en-US">
+              <a:rPr sz="2200" b="0" lang="zh-CN" altLang="en-US">
                 <a:solidFill>
                   <a:srgbClr val="FFFFFF"/>
                 </a:solidFill>
-                <a:ea typeface="Noto Sans SC Static"/>
+                <a:ea typeface="Noto Sans SC Static Black"/>
               </a:rPr>
               <a:t>结</a:t>
             </a:r>
@@ -19516,11 +19516,11 @@
               </a:spcBef>
             </a:pPr>
             <a:r>
-              <a:rPr sz="2200" b="1" lang="zh-CN" altLang="en-US">
+              <a:rPr sz="2200" b="0" lang="zh-CN" altLang="en-US">
                 <a:solidFill>
                   <a:srgbClr val="FFFFFF"/>
                 </a:solidFill>
-                <a:ea typeface="Noto Sans SC Static"/>
+                <a:ea typeface="Noto Sans SC Static Black"/>
               </a:rPr>
               <a:t>果</a:t>
             </a:r>
